--- a/doc/AkiBot.pptx
+++ b/doc/AkiBot.pptx
@@ -164,7 +164,7 @@
           <a:noFill/>
           <a:extLst>
             <a:ext uri="{909E8E84-426E-40dd-AFC4-6F175D3DCCD1}">
-              <a14:hiddenFill xmlns="" xmlns:a14="http://schemas.microsoft.com/office/drawing/2010/main">
+              <a14:hiddenFill xmlns:a14="http://schemas.microsoft.com/office/drawing/2010/main" xmlns="">
                 <a:solidFill>
                   <a:srgbClr val="FFFFFF"/>
                 </a:solidFill>
@@ -224,7 +224,7 @@
             </a:ln>
             <a:extLst>
               <a:ext uri="{91240B29-F687-4f45-9708-019B960494DF}">
-                <a14:hiddenLine xmlns="" xmlns:a14="http://schemas.microsoft.com/office/drawing/2010/main" w="9525">
+                <a14:hiddenLine xmlns:a14="http://schemas.microsoft.com/office/drawing/2010/main" xmlns="" w="9525">
                   <a:solidFill>
                     <a:srgbClr val="000000"/>
                   </a:solidFill>
@@ -314,7 +314,7 @@
             </a:ln>
             <a:extLst>
               <a:ext uri="{91240B29-F687-4f45-9708-019B960494DF}">
-                <a14:hiddenLine xmlns="" xmlns:a14="http://schemas.microsoft.com/office/drawing/2010/main" w="9525">
+                <a14:hiddenLine xmlns:a14="http://schemas.microsoft.com/office/drawing/2010/main" xmlns="" w="9525">
                   <a:solidFill>
                     <a:srgbClr val="000000"/>
                   </a:solidFill>
@@ -404,7 +404,7 @@
             </a:ln>
             <a:extLst>
               <a:ext uri="{91240B29-F687-4f45-9708-019B960494DF}">
-                <a14:hiddenLine xmlns="" xmlns:a14="http://schemas.microsoft.com/office/drawing/2010/main" w="9525">
+                <a14:hiddenLine xmlns:a14="http://schemas.microsoft.com/office/drawing/2010/main" xmlns="" w="9525">
                   <a:solidFill>
                     <a:srgbClr val="000000"/>
                   </a:solidFill>
@@ -438,7 +438,7 @@
             </a:ln>
             <a:extLst>
               <a:ext uri="{91240B29-F687-4f45-9708-019B960494DF}">
-                <a14:hiddenLine xmlns="" xmlns:a14="http://schemas.microsoft.com/office/drawing/2010/main" w="9525">
+                <a14:hiddenLine xmlns:a14="http://schemas.microsoft.com/office/drawing/2010/main" xmlns="" w="9525">
                   <a:solidFill>
                     <a:srgbClr val="000000"/>
                   </a:solidFill>
@@ -528,7 +528,7 @@
             </a:ln>
             <a:extLst>
               <a:ext uri="{91240B29-F687-4f45-9708-019B960494DF}">
-                <a14:hiddenLine xmlns="" xmlns:a14="http://schemas.microsoft.com/office/drawing/2010/main" w="9525">
+                <a14:hiddenLine xmlns:a14="http://schemas.microsoft.com/office/drawing/2010/main" xmlns="" w="9525">
                   <a:solidFill>
                     <a:srgbClr val="000000"/>
                   </a:solidFill>
@@ -590,7 +590,7 @@
             </a:ln>
             <a:extLst>
               <a:ext uri="{91240B29-F687-4f45-9708-019B960494DF}">
-                <a14:hiddenLine xmlns="" xmlns:a14="http://schemas.microsoft.com/office/drawing/2010/main" w="9525">
+                <a14:hiddenLine xmlns:a14="http://schemas.microsoft.com/office/drawing/2010/main" xmlns="" w="9525">
                   <a:solidFill>
                     <a:srgbClr val="000000"/>
                   </a:solidFill>
@@ -652,7 +652,7 @@
             </a:ln>
             <a:extLst>
               <a:ext uri="{91240B29-F687-4f45-9708-019B960494DF}">
-                <a14:hiddenLine xmlns="" xmlns:a14="http://schemas.microsoft.com/office/drawing/2010/main" w="9525">
+                <a14:hiddenLine xmlns:a14="http://schemas.microsoft.com/office/drawing/2010/main" xmlns="" w="9525">
                   <a:solidFill>
                     <a:srgbClr val="000000"/>
                   </a:solidFill>
@@ -742,7 +742,7 @@
             </a:ln>
             <a:extLst>
               <a:ext uri="{91240B29-F687-4f45-9708-019B960494DF}">
-                <a14:hiddenLine xmlns="" xmlns:a14="http://schemas.microsoft.com/office/drawing/2010/main" w="9525">
+                <a14:hiddenLine xmlns:a14="http://schemas.microsoft.com/office/drawing/2010/main" xmlns="" w="9525">
                   <a:solidFill>
                     <a:srgbClr val="000000"/>
                   </a:solidFill>
@@ -804,7 +804,7 @@
             </a:ln>
             <a:extLst>
               <a:ext uri="{91240B29-F687-4f45-9708-019B960494DF}">
-                <a14:hiddenLine xmlns="" xmlns:a14="http://schemas.microsoft.com/office/drawing/2010/main" w="9525">
+                <a14:hiddenLine xmlns:a14="http://schemas.microsoft.com/office/drawing/2010/main" xmlns="" w="9525">
                   <a:solidFill>
                     <a:srgbClr val="000000"/>
                   </a:solidFill>
@@ -866,7 +866,7 @@
             </a:ln>
             <a:extLst>
               <a:ext uri="{91240B29-F687-4f45-9708-019B960494DF}">
-                <a14:hiddenLine xmlns="" xmlns:a14="http://schemas.microsoft.com/office/drawing/2010/main" w="9525">
+                <a14:hiddenLine xmlns:a14="http://schemas.microsoft.com/office/drawing/2010/main" xmlns="" w="9525">
                   <a:solidFill>
                     <a:srgbClr val="000000"/>
                   </a:solidFill>
@@ -956,7 +956,7 @@
             </a:ln>
             <a:extLst>
               <a:ext uri="{91240B29-F687-4f45-9708-019B960494DF}">
-                <a14:hiddenLine xmlns="" xmlns:a14="http://schemas.microsoft.com/office/drawing/2010/main" w="9525">
+                <a14:hiddenLine xmlns:a14="http://schemas.microsoft.com/office/drawing/2010/main" xmlns="" w="9525">
                   <a:solidFill>
                     <a:srgbClr val="000000"/>
                   </a:solidFill>
@@ -1046,7 +1046,7 @@
             </a:ln>
             <a:extLst>
               <a:ext uri="{91240B29-F687-4f45-9708-019B960494DF}">
-                <a14:hiddenLine xmlns="" xmlns:a14="http://schemas.microsoft.com/office/drawing/2010/main" w="9525">
+                <a14:hiddenLine xmlns:a14="http://schemas.microsoft.com/office/drawing/2010/main" xmlns="" w="9525">
                   <a:solidFill>
                     <a:srgbClr val="000000"/>
                   </a:solidFill>
@@ -1108,7 +1108,7 @@
             </a:ln>
             <a:extLst>
               <a:ext uri="{91240B29-F687-4f45-9708-019B960494DF}">
-                <a14:hiddenLine xmlns="" xmlns:a14="http://schemas.microsoft.com/office/drawing/2010/main" w="9525">
+                <a14:hiddenLine xmlns:a14="http://schemas.microsoft.com/office/drawing/2010/main" xmlns="" w="9525">
                   <a:solidFill>
                     <a:srgbClr val="000000"/>
                   </a:solidFill>
@@ -1218,7 +1218,7 @@
             </a:ln>
             <a:extLst>
               <a:ext uri="{91240B29-F687-4f45-9708-019B960494DF}">
-                <a14:hiddenLine xmlns="" xmlns:a14="http://schemas.microsoft.com/office/drawing/2010/main" w="9525">
+                <a14:hiddenLine xmlns:a14="http://schemas.microsoft.com/office/drawing/2010/main" xmlns="" w="9525">
                   <a:solidFill>
                     <a:srgbClr val="000000"/>
                   </a:solidFill>
@@ -1280,7 +1280,7 @@
             </a:ln>
             <a:extLst>
               <a:ext uri="{91240B29-F687-4f45-9708-019B960494DF}">
-                <a14:hiddenLine xmlns="" xmlns:a14="http://schemas.microsoft.com/office/drawing/2010/main" w="9525">
+                <a14:hiddenLine xmlns:a14="http://schemas.microsoft.com/office/drawing/2010/main" xmlns="" w="9525">
                   <a:solidFill>
                     <a:srgbClr val="000000"/>
                   </a:solidFill>
@@ -1370,7 +1370,7 @@
             </a:ln>
             <a:extLst>
               <a:ext uri="{91240B29-F687-4f45-9708-019B960494DF}">
-                <a14:hiddenLine xmlns="" xmlns:a14="http://schemas.microsoft.com/office/drawing/2010/main" w="9525">
+                <a14:hiddenLine xmlns:a14="http://schemas.microsoft.com/office/drawing/2010/main" xmlns="" w="9525">
                   <a:solidFill>
                     <a:srgbClr val="000000"/>
                   </a:solidFill>
@@ -1460,7 +1460,7 @@
             </a:ln>
             <a:extLst>
               <a:ext uri="{91240B29-F687-4f45-9708-019B960494DF}">
-                <a14:hiddenLine xmlns="" xmlns:a14="http://schemas.microsoft.com/office/drawing/2010/main" w="9525">
+                <a14:hiddenLine xmlns:a14="http://schemas.microsoft.com/office/drawing/2010/main" xmlns="" w="9525">
                   <a:solidFill>
                     <a:srgbClr val="000000"/>
                   </a:solidFill>
@@ -1522,7 +1522,7 @@
             </a:ln>
             <a:extLst>
               <a:ext uri="{91240B29-F687-4f45-9708-019B960494DF}">
-                <a14:hiddenLine xmlns="" xmlns:a14="http://schemas.microsoft.com/office/drawing/2010/main" w="9525">
+                <a14:hiddenLine xmlns:a14="http://schemas.microsoft.com/office/drawing/2010/main" xmlns="" w="9525">
                   <a:solidFill>
                     <a:srgbClr val="000000"/>
                   </a:solidFill>
@@ -1612,7 +1612,7 @@
             </a:ln>
             <a:extLst>
               <a:ext uri="{91240B29-F687-4f45-9708-019B960494DF}">
-                <a14:hiddenLine xmlns="" xmlns:a14="http://schemas.microsoft.com/office/drawing/2010/main" w="9525">
+                <a14:hiddenLine xmlns:a14="http://schemas.microsoft.com/office/drawing/2010/main" xmlns="" w="9525">
                   <a:solidFill>
                     <a:srgbClr val="000000"/>
                   </a:solidFill>
@@ -1702,7 +1702,7 @@
             </a:ln>
             <a:extLst>
               <a:ext uri="{91240B29-F687-4f45-9708-019B960494DF}">
-                <a14:hiddenLine xmlns="" xmlns:a14="http://schemas.microsoft.com/office/drawing/2010/main" w="9525">
+                <a14:hiddenLine xmlns:a14="http://schemas.microsoft.com/office/drawing/2010/main" xmlns="" w="9525">
                   <a:solidFill>
                     <a:srgbClr val="000000"/>
                   </a:solidFill>
@@ -1758,7 +1758,7 @@
             </a:ln>
             <a:extLst>
               <a:ext uri="{91240B29-F687-4f45-9708-019B960494DF}">
-                <a14:hiddenLine xmlns="" xmlns:a14="http://schemas.microsoft.com/office/drawing/2010/main" w="9525">
+                <a14:hiddenLine xmlns:a14="http://schemas.microsoft.com/office/drawing/2010/main" xmlns="" w="9525">
                   <a:solidFill>
                     <a:srgbClr val="000000"/>
                   </a:solidFill>
@@ -1848,7 +1848,7 @@
             </a:ln>
             <a:extLst>
               <a:ext uri="{91240B29-F687-4f45-9708-019B960494DF}">
-                <a14:hiddenLine xmlns="" xmlns:a14="http://schemas.microsoft.com/office/drawing/2010/main" w="9525">
+                <a14:hiddenLine xmlns:a14="http://schemas.microsoft.com/office/drawing/2010/main" xmlns="" w="9525">
                   <a:solidFill>
                     <a:srgbClr val="000000"/>
                   </a:solidFill>
@@ -1904,7 +1904,7 @@
             </a:ln>
             <a:extLst>
               <a:ext uri="{91240B29-F687-4f45-9708-019B960494DF}">
-                <a14:hiddenLine xmlns="" xmlns:a14="http://schemas.microsoft.com/office/drawing/2010/main" w="9525">
+                <a14:hiddenLine xmlns:a14="http://schemas.microsoft.com/office/drawing/2010/main" xmlns="" w="9525">
                   <a:solidFill>
                     <a:srgbClr val="000000"/>
                   </a:solidFill>
@@ -1994,7 +1994,7 @@
             </a:ln>
             <a:extLst>
               <a:ext uri="{91240B29-F687-4f45-9708-019B960494DF}">
-                <a14:hiddenLine xmlns="" xmlns:a14="http://schemas.microsoft.com/office/drawing/2010/main" w="9525">
+                <a14:hiddenLine xmlns:a14="http://schemas.microsoft.com/office/drawing/2010/main" xmlns="" w="9525">
                   <a:solidFill>
                     <a:srgbClr val="000000"/>
                   </a:solidFill>
@@ -2062,7 +2062,7 @@
             </a:ln>
             <a:extLst>
               <a:ext uri="{91240B29-F687-4f45-9708-019B960494DF}">
-                <a14:hiddenLine xmlns="" xmlns:a14="http://schemas.microsoft.com/office/drawing/2010/main" w="9525">
+                <a14:hiddenLine xmlns:a14="http://schemas.microsoft.com/office/drawing/2010/main" xmlns="" w="9525">
                   <a:solidFill>
                     <a:srgbClr val="000000"/>
                   </a:solidFill>
@@ -2152,7 +2152,7 @@
             </a:ln>
             <a:extLst>
               <a:ext uri="{91240B29-F687-4f45-9708-019B960494DF}">
-                <a14:hiddenLine xmlns="" xmlns:a14="http://schemas.microsoft.com/office/drawing/2010/main" w="9525">
+                <a14:hiddenLine xmlns:a14="http://schemas.microsoft.com/office/drawing/2010/main" xmlns="" w="9525">
                   <a:solidFill>
                     <a:srgbClr val="000000"/>
                   </a:solidFill>
@@ -2220,7 +2220,7 @@
             </a:ln>
             <a:extLst>
               <a:ext uri="{91240B29-F687-4f45-9708-019B960494DF}">
-                <a14:hiddenLine xmlns="" xmlns:a14="http://schemas.microsoft.com/office/drawing/2010/main" w="9525">
+                <a14:hiddenLine xmlns:a14="http://schemas.microsoft.com/office/drawing/2010/main" xmlns="" w="9525">
                   <a:solidFill>
                     <a:srgbClr val="000000"/>
                   </a:solidFill>
@@ -2310,7 +2310,7 @@
             </a:ln>
             <a:extLst>
               <a:ext uri="{91240B29-F687-4f45-9708-019B960494DF}">
-                <a14:hiddenLine xmlns="" xmlns:a14="http://schemas.microsoft.com/office/drawing/2010/main" w="9525">
+                <a14:hiddenLine xmlns:a14="http://schemas.microsoft.com/office/drawing/2010/main" xmlns="" w="9525">
                   <a:solidFill>
                     <a:srgbClr val="000000"/>
                   </a:solidFill>
@@ -2344,7 +2344,7 @@
             </a:ln>
             <a:extLst>
               <a:ext uri="{91240B29-F687-4f45-9708-019B960494DF}">
-                <a14:hiddenLine xmlns="" xmlns:a14="http://schemas.microsoft.com/office/drawing/2010/main" w="9525">
+                <a14:hiddenLine xmlns:a14="http://schemas.microsoft.com/office/drawing/2010/main" xmlns="" w="9525">
                   <a:solidFill>
                     <a:srgbClr val="000000"/>
                   </a:solidFill>
@@ -2434,7 +2434,7 @@
             </a:ln>
             <a:extLst>
               <a:ext uri="{91240B29-F687-4f45-9708-019B960494DF}">
-                <a14:hiddenLine xmlns="" xmlns:a14="http://schemas.microsoft.com/office/drawing/2010/main" w="9525">
+                <a14:hiddenLine xmlns:a14="http://schemas.microsoft.com/office/drawing/2010/main" xmlns="" w="9525">
                   <a:solidFill>
                     <a:srgbClr val="000000"/>
                   </a:solidFill>
@@ -2496,7 +2496,7 @@
             </a:ln>
             <a:extLst>
               <a:ext uri="{91240B29-F687-4f45-9708-019B960494DF}">
-                <a14:hiddenLine xmlns="" xmlns:a14="http://schemas.microsoft.com/office/drawing/2010/main" w="9525">
+                <a14:hiddenLine xmlns:a14="http://schemas.microsoft.com/office/drawing/2010/main" xmlns="" w="9525">
                   <a:solidFill>
                     <a:srgbClr val="000000"/>
                   </a:solidFill>
@@ -2558,7 +2558,7 @@
             </a:ln>
             <a:extLst>
               <a:ext uri="{91240B29-F687-4f45-9708-019B960494DF}">
-                <a14:hiddenLine xmlns="" xmlns:a14="http://schemas.microsoft.com/office/drawing/2010/main" w="9525">
+                <a14:hiddenLine xmlns:a14="http://schemas.microsoft.com/office/drawing/2010/main" xmlns="" w="9525">
                   <a:solidFill>
                     <a:srgbClr val="000000"/>
                   </a:solidFill>
@@ -2648,7 +2648,7 @@
             </a:ln>
             <a:extLst>
               <a:ext uri="{91240B29-F687-4f45-9708-019B960494DF}">
-                <a14:hiddenLine xmlns="" xmlns:a14="http://schemas.microsoft.com/office/drawing/2010/main" w="9525">
+                <a14:hiddenLine xmlns:a14="http://schemas.microsoft.com/office/drawing/2010/main" xmlns="" w="9525">
                   <a:solidFill>
                     <a:srgbClr val="000000"/>
                   </a:solidFill>
@@ -2716,7 +2716,7 @@
             </a:ln>
             <a:extLst>
               <a:ext uri="{91240B29-F687-4f45-9708-019B960494DF}">
-                <a14:hiddenLine xmlns="" xmlns:a14="http://schemas.microsoft.com/office/drawing/2010/main" w="9525">
+                <a14:hiddenLine xmlns:a14="http://schemas.microsoft.com/office/drawing/2010/main" xmlns="" w="9525">
                   <a:solidFill>
                     <a:srgbClr val="000000"/>
                   </a:solidFill>
@@ -2778,7 +2778,7 @@
             </a:ln>
             <a:extLst>
               <a:ext uri="{91240B29-F687-4f45-9708-019B960494DF}">
-                <a14:hiddenLine xmlns="" xmlns:a14="http://schemas.microsoft.com/office/drawing/2010/main" w="9525">
+                <a14:hiddenLine xmlns:a14="http://schemas.microsoft.com/office/drawing/2010/main" xmlns="" w="9525">
                   <a:solidFill>
                     <a:srgbClr val="000000"/>
                   </a:solidFill>
@@ -2868,7 +2868,7 @@
             </a:ln>
             <a:extLst>
               <a:ext uri="{91240B29-F687-4f45-9708-019B960494DF}">
-                <a14:hiddenLine xmlns="" xmlns:a14="http://schemas.microsoft.com/office/drawing/2010/main" w="9525">
+                <a14:hiddenLine xmlns:a14="http://schemas.microsoft.com/office/drawing/2010/main" xmlns="" w="9525">
                   <a:solidFill>
                     <a:srgbClr val="000000"/>
                   </a:solidFill>
@@ -2930,7 +2930,7 @@
             </a:ln>
             <a:extLst>
               <a:ext uri="{91240B29-F687-4f45-9708-019B960494DF}">
-                <a14:hiddenLine xmlns="" xmlns:a14="http://schemas.microsoft.com/office/drawing/2010/main" w="9525">
+                <a14:hiddenLine xmlns:a14="http://schemas.microsoft.com/office/drawing/2010/main" xmlns="" w="9525">
                   <a:solidFill>
                     <a:srgbClr val="000000"/>
                   </a:solidFill>
@@ -3020,7 +3020,7 @@
             </a:ln>
             <a:extLst>
               <a:ext uri="{91240B29-F687-4f45-9708-019B960494DF}">
-                <a14:hiddenLine xmlns="" xmlns:a14="http://schemas.microsoft.com/office/drawing/2010/main" w="9525">
+                <a14:hiddenLine xmlns:a14="http://schemas.microsoft.com/office/drawing/2010/main" xmlns="" w="9525">
                   <a:solidFill>
                     <a:srgbClr val="000000"/>
                   </a:solidFill>
@@ -3082,7 +3082,7 @@
             </a:ln>
             <a:extLst>
               <a:ext uri="{91240B29-F687-4f45-9708-019B960494DF}">
-                <a14:hiddenLine xmlns="" xmlns:a14="http://schemas.microsoft.com/office/drawing/2010/main" w="9525">
+                <a14:hiddenLine xmlns:a14="http://schemas.microsoft.com/office/drawing/2010/main" xmlns="" w="9525">
                   <a:solidFill>
                     <a:srgbClr val="000000"/>
                   </a:solidFill>
@@ -3172,7 +3172,7 @@
             </a:ln>
             <a:extLst>
               <a:ext uri="{91240B29-F687-4f45-9708-019B960494DF}">
-                <a14:hiddenLine xmlns="" xmlns:a14="http://schemas.microsoft.com/office/drawing/2010/main" w="9525">
+                <a14:hiddenLine xmlns:a14="http://schemas.microsoft.com/office/drawing/2010/main" xmlns="" w="9525">
                   <a:solidFill>
                     <a:srgbClr val="000000"/>
                   </a:solidFill>
@@ -3206,7 +3206,7 @@
             </a:ln>
             <a:extLst>
               <a:ext uri="{91240B29-F687-4f45-9708-019B960494DF}">
-                <a14:hiddenLine xmlns="" xmlns:a14="http://schemas.microsoft.com/office/drawing/2010/main" w="9525">
+                <a14:hiddenLine xmlns:a14="http://schemas.microsoft.com/office/drawing/2010/main" xmlns="" w="9525">
                   <a:solidFill>
                     <a:srgbClr val="000000"/>
                   </a:solidFill>
@@ -3271,7 +3271,7 @@
             </a:ln>
             <a:extLst>
               <a:ext uri="{91240B29-F687-4f45-9708-019B960494DF}">
-                <a14:hiddenLine xmlns="" xmlns:a14="http://schemas.microsoft.com/office/drawing/2010/main" w="9525">
+                <a14:hiddenLine xmlns:a14="http://schemas.microsoft.com/office/drawing/2010/main" xmlns="" w="9525">
                   <a:solidFill>
                     <a:srgbClr val="000000"/>
                   </a:solidFill>
@@ -3361,7 +3361,7 @@
             </a:ln>
             <a:extLst>
               <a:ext uri="{91240B29-F687-4f45-9708-019B960494DF}">
-                <a14:hiddenLine xmlns="" xmlns:a14="http://schemas.microsoft.com/office/drawing/2010/main" w="9525">
+                <a14:hiddenLine xmlns:a14="http://schemas.microsoft.com/office/drawing/2010/main" xmlns="" w="9525">
                   <a:solidFill>
                     <a:srgbClr val="000000"/>
                   </a:solidFill>
@@ -3423,7 +3423,7 @@
             </a:ln>
             <a:extLst>
               <a:ext uri="{91240B29-F687-4f45-9708-019B960494DF}">
-                <a14:hiddenLine xmlns="" xmlns:a14="http://schemas.microsoft.com/office/drawing/2010/main" w="9525">
+                <a14:hiddenLine xmlns:a14="http://schemas.microsoft.com/office/drawing/2010/main" xmlns="" w="9525">
                   <a:solidFill>
                     <a:srgbClr val="000000"/>
                   </a:solidFill>
@@ -3513,7 +3513,7 @@
             </a:ln>
             <a:extLst>
               <a:ext uri="{91240B29-F687-4f45-9708-019B960494DF}">
-                <a14:hiddenLine xmlns="" xmlns:a14="http://schemas.microsoft.com/office/drawing/2010/main" w="9525">
+                <a14:hiddenLine xmlns:a14="http://schemas.microsoft.com/office/drawing/2010/main" xmlns="" w="9525">
                   <a:solidFill>
                     <a:srgbClr val="000000"/>
                   </a:solidFill>
@@ -3603,7 +3603,7 @@
             </a:ln>
             <a:extLst>
               <a:ext uri="{91240B29-F687-4f45-9708-019B960494DF}">
-                <a14:hiddenLine xmlns="" xmlns:a14="http://schemas.microsoft.com/office/drawing/2010/main" w="9525">
+                <a14:hiddenLine xmlns:a14="http://schemas.microsoft.com/office/drawing/2010/main" xmlns="" w="9525">
                   <a:solidFill>
                     <a:srgbClr val="000000"/>
                   </a:solidFill>
@@ -3668,7 +3668,7 @@
             </a:ln>
             <a:extLst>
               <a:ext uri="{91240B29-F687-4f45-9708-019B960494DF}">
-                <a14:hiddenLine xmlns="" xmlns:a14="http://schemas.microsoft.com/office/drawing/2010/main" w="9525">
+                <a14:hiddenLine xmlns:a14="http://schemas.microsoft.com/office/drawing/2010/main" xmlns="" w="9525">
                   <a:solidFill>
                     <a:srgbClr val="000000"/>
                   </a:solidFill>
@@ -3730,7 +3730,7 @@
             </a:ln>
             <a:extLst>
               <a:ext uri="{91240B29-F687-4f45-9708-019B960494DF}">
-                <a14:hiddenLine xmlns="" xmlns:a14="http://schemas.microsoft.com/office/drawing/2010/main" w="9525">
+                <a14:hiddenLine xmlns:a14="http://schemas.microsoft.com/office/drawing/2010/main" xmlns="" w="9525">
                   <a:solidFill>
                     <a:srgbClr val="000000"/>
                   </a:solidFill>
@@ -3820,7 +3820,7 @@
             </a:ln>
             <a:extLst>
               <a:ext uri="{91240B29-F687-4f45-9708-019B960494DF}">
-                <a14:hiddenLine xmlns="" xmlns:a14="http://schemas.microsoft.com/office/drawing/2010/main" w="9525">
+                <a14:hiddenLine xmlns:a14="http://schemas.microsoft.com/office/drawing/2010/main" xmlns="" w="9525">
                   <a:solidFill>
                     <a:srgbClr val="000000"/>
                   </a:solidFill>
@@ -3910,7 +3910,7 @@
             </a:ln>
             <a:extLst>
               <a:ext uri="{91240B29-F687-4f45-9708-019B960494DF}">
-                <a14:hiddenLine xmlns="" xmlns:a14="http://schemas.microsoft.com/office/drawing/2010/main" w="9525">
+                <a14:hiddenLine xmlns:a14="http://schemas.microsoft.com/office/drawing/2010/main" xmlns="" w="9525">
                   <a:solidFill>
                     <a:srgbClr val="000000"/>
                   </a:solidFill>
@@ -3972,7 +3972,7 @@
             </a:ln>
             <a:extLst>
               <a:ext uri="{91240B29-F687-4f45-9708-019B960494DF}">
-                <a14:hiddenLine xmlns="" xmlns:a14="http://schemas.microsoft.com/office/drawing/2010/main" w="9525">
+                <a14:hiddenLine xmlns:a14="http://schemas.microsoft.com/office/drawing/2010/main" xmlns="" w="9525">
                   <a:solidFill>
                     <a:srgbClr val="000000"/>
                   </a:solidFill>
@@ -4092,7 +4092,7 @@
             </a:ln>
             <a:extLst>
               <a:ext uri="{91240B29-F687-4f45-9708-019B960494DF}">
-                <a14:hiddenLine xmlns="" xmlns:a14="http://schemas.microsoft.com/office/drawing/2010/main" w="9525">
+                <a14:hiddenLine xmlns:a14="http://schemas.microsoft.com/office/drawing/2010/main" xmlns="" w="9525">
                   <a:solidFill>
                     <a:srgbClr val="000000"/>
                   </a:solidFill>
@@ -4160,7 +4160,7 @@
             </a:ln>
             <a:extLst>
               <a:ext uri="{91240B29-F687-4f45-9708-019B960494DF}">
-                <a14:hiddenLine xmlns="" xmlns:a14="http://schemas.microsoft.com/office/drawing/2010/main" w="9525">
+                <a14:hiddenLine xmlns:a14="http://schemas.microsoft.com/office/drawing/2010/main" xmlns="" w="9525">
                   <a:solidFill>
                     <a:srgbClr val="000000"/>
                   </a:solidFill>
@@ -4250,7 +4250,7 @@
             </a:ln>
             <a:extLst>
               <a:ext uri="{91240B29-F687-4f45-9708-019B960494DF}">
-                <a14:hiddenLine xmlns="" xmlns:a14="http://schemas.microsoft.com/office/drawing/2010/main" w="9525">
+                <a14:hiddenLine xmlns:a14="http://schemas.microsoft.com/office/drawing/2010/main" xmlns="" w="9525">
                   <a:solidFill>
                     <a:srgbClr val="000000"/>
                   </a:solidFill>
@@ -4390,7 +4390,7 @@
           <a:p>
             <a:fld id="{64DCE64C-8487-40EE-8727-5E483AC79F68}" type="datetimeFigureOut">
               <a:rPr lang="ru-RU" smtClean="0"/>
-              <a:t>2015.01.15</a:t>
+              <a:t>2015.01.16</a:t>
             </a:fld>
             <a:endParaRPr lang="ru-RU"/>
           </a:p>
@@ -4657,7 +4657,7 @@
           <a:p>
             <a:fld id="{64DCE64C-8487-40EE-8727-5E483AC79F68}" type="datetimeFigureOut">
               <a:rPr lang="ru-RU" smtClean="0"/>
-              <a:t>2015.01.15</a:t>
+              <a:t>2015.01.16</a:t>
             </a:fld>
             <a:endParaRPr lang="ru-RU"/>
           </a:p>
@@ -4853,7 +4853,7 @@
           <a:p>
             <a:fld id="{64DCE64C-8487-40EE-8727-5E483AC79F68}" type="datetimeFigureOut">
               <a:rPr lang="ru-RU" smtClean="0"/>
-              <a:t>2015.01.15</a:t>
+              <a:t>2015.01.16</a:t>
             </a:fld>
             <a:endParaRPr lang="ru-RU"/>
           </a:p>
@@ -5116,7 +5116,7 @@
           <a:p>
             <a:fld id="{64DCE64C-8487-40EE-8727-5E483AC79F68}" type="datetimeFigureOut">
               <a:rPr lang="ru-RU" smtClean="0"/>
-              <a:t>2015.01.15</a:t>
+              <a:t>2015.01.16</a:t>
             </a:fld>
             <a:endParaRPr lang="ru-RU"/>
           </a:p>
@@ -5550,7 +5550,7 @@
           <a:p>
             <a:fld id="{64DCE64C-8487-40EE-8727-5E483AC79F68}" type="datetimeFigureOut">
               <a:rPr lang="ru-RU" smtClean="0"/>
-              <a:t>2015.01.15</a:t>
+              <a:t>2015.01.16</a:t>
             </a:fld>
             <a:endParaRPr lang="ru-RU"/>
           </a:p>
@@ -6096,7 +6096,7 @@
           <a:p>
             <a:fld id="{64DCE64C-8487-40EE-8727-5E483AC79F68}" type="datetimeFigureOut">
               <a:rPr lang="ru-RU" smtClean="0"/>
-              <a:t>2015.01.15</a:t>
+              <a:t>2015.01.16</a:t>
             </a:fld>
             <a:endParaRPr lang="ru-RU"/>
           </a:p>
@@ -6816,7 +6816,7 @@
           <a:p>
             <a:fld id="{64DCE64C-8487-40EE-8727-5E483AC79F68}" type="datetimeFigureOut">
               <a:rPr lang="ru-RU" smtClean="0"/>
-              <a:t>2015.01.15</a:t>
+              <a:t>2015.01.16</a:t>
             </a:fld>
             <a:endParaRPr lang="ru-RU"/>
           </a:p>
@@ -6986,7 +6986,7 @@
           <a:p>
             <a:fld id="{64DCE64C-8487-40EE-8727-5E483AC79F68}" type="datetimeFigureOut">
               <a:rPr lang="ru-RU" smtClean="0"/>
-              <a:t>2015.01.15</a:t>
+              <a:t>2015.01.16</a:t>
             </a:fld>
             <a:endParaRPr lang="ru-RU"/>
           </a:p>
@@ -7166,7 +7166,7 @@
           <a:p>
             <a:fld id="{64DCE64C-8487-40EE-8727-5E483AC79F68}" type="datetimeFigureOut">
               <a:rPr lang="ru-RU" smtClean="0"/>
-              <a:t>2015.01.15</a:t>
+              <a:t>2015.01.16</a:t>
             </a:fld>
             <a:endParaRPr lang="ru-RU"/>
           </a:p>
@@ -7336,7 +7336,7 @@
           <a:p>
             <a:fld id="{64DCE64C-8487-40EE-8727-5E483AC79F68}" type="datetimeFigureOut">
               <a:rPr lang="ru-RU" smtClean="0"/>
-              <a:t>2015.01.15</a:t>
+              <a:t>2015.01.16</a:t>
             </a:fld>
             <a:endParaRPr lang="ru-RU"/>
           </a:p>
@@ -7586,7 +7586,7 @@
           <a:p>
             <a:fld id="{64DCE64C-8487-40EE-8727-5E483AC79F68}" type="datetimeFigureOut">
               <a:rPr lang="ru-RU" smtClean="0"/>
-              <a:t>2015.01.15</a:t>
+              <a:t>2015.01.16</a:t>
             </a:fld>
             <a:endParaRPr lang="ru-RU"/>
           </a:p>
@@ -7818,7 +7818,7 @@
           <a:p>
             <a:fld id="{64DCE64C-8487-40EE-8727-5E483AC79F68}" type="datetimeFigureOut">
               <a:rPr lang="ru-RU" smtClean="0"/>
-              <a:t>2015.01.15</a:t>
+              <a:t>2015.01.16</a:t>
             </a:fld>
             <a:endParaRPr lang="ru-RU"/>
           </a:p>
@@ -8199,7 +8199,7 @@
           <a:p>
             <a:fld id="{64DCE64C-8487-40EE-8727-5E483AC79F68}" type="datetimeFigureOut">
               <a:rPr lang="ru-RU" smtClean="0"/>
-              <a:t>2015.01.15</a:t>
+              <a:t>2015.01.16</a:t>
             </a:fld>
             <a:endParaRPr lang="ru-RU"/>
           </a:p>
@@ -8317,7 +8317,7 @@
           <a:p>
             <a:fld id="{64DCE64C-8487-40EE-8727-5E483AC79F68}" type="datetimeFigureOut">
               <a:rPr lang="ru-RU" smtClean="0"/>
-              <a:t>2015.01.15</a:t>
+              <a:t>2015.01.16</a:t>
             </a:fld>
             <a:endParaRPr lang="ru-RU"/>
           </a:p>
@@ -8412,7 +8412,7 @@
           <a:p>
             <a:fld id="{64DCE64C-8487-40EE-8727-5E483AC79F68}" type="datetimeFigureOut">
               <a:rPr lang="ru-RU" smtClean="0"/>
-              <a:t>2015.01.15</a:t>
+              <a:t>2015.01.16</a:t>
             </a:fld>
             <a:endParaRPr lang="ru-RU"/>
           </a:p>
@@ -8661,7 +8661,7 @@
           <a:p>
             <a:fld id="{64DCE64C-8487-40EE-8727-5E483AC79F68}" type="datetimeFigureOut">
               <a:rPr lang="ru-RU" smtClean="0"/>
-              <a:t>2015.01.15</a:t>
+              <a:t>2015.01.16</a:t>
             </a:fld>
             <a:endParaRPr lang="ru-RU"/>
           </a:p>
@@ -8941,7 +8941,7 @@
           <a:p>
             <a:fld id="{64DCE64C-8487-40EE-8727-5E483AC79F68}" type="datetimeFigureOut">
               <a:rPr lang="ru-RU" smtClean="0"/>
-              <a:t>2015.01.15</a:t>
+              <a:t>2015.01.16</a:t>
             </a:fld>
             <a:endParaRPr lang="ru-RU"/>
           </a:p>
@@ -9057,7 +9057,7 @@
           <a:noFill/>
           <a:extLst>
             <a:ext uri="{909E8E84-426E-40dd-AFC4-6F175D3DCCD1}">
-              <a14:hiddenFill xmlns="" xmlns:a14="http://schemas.microsoft.com/office/drawing/2010/main">
+              <a14:hiddenFill xmlns:a14="http://schemas.microsoft.com/office/drawing/2010/main" xmlns="">
                 <a:solidFill>
                   <a:srgbClr val="FFFFFF"/>
                 </a:solidFill>
@@ -9131,7 +9131,7 @@
               </a:ln>
               <a:extLst>
                 <a:ext uri="{91240B29-F687-4f45-9708-019B960494DF}">
-                  <a14:hiddenLine xmlns="" xmlns:a14="http://schemas.microsoft.com/office/drawing/2010/main" w="9525">
+                  <a14:hiddenLine xmlns:a14="http://schemas.microsoft.com/office/drawing/2010/main" xmlns="" w="9525">
                     <a:solidFill>
                       <a:srgbClr val="000000"/>
                     </a:solidFill>
@@ -9221,7 +9221,7 @@
               </a:ln>
               <a:extLst>
                 <a:ext uri="{91240B29-F687-4f45-9708-019B960494DF}">
-                  <a14:hiddenLine xmlns="" xmlns:a14="http://schemas.microsoft.com/office/drawing/2010/main" w="9525">
+                  <a14:hiddenLine xmlns:a14="http://schemas.microsoft.com/office/drawing/2010/main" xmlns="" w="9525">
                     <a:solidFill>
                       <a:srgbClr val="000000"/>
                     </a:solidFill>
@@ -9311,7 +9311,7 @@
               </a:ln>
               <a:extLst>
                 <a:ext uri="{91240B29-F687-4f45-9708-019B960494DF}">
-                  <a14:hiddenLine xmlns="" xmlns:a14="http://schemas.microsoft.com/office/drawing/2010/main" w="9525">
+                  <a14:hiddenLine xmlns:a14="http://schemas.microsoft.com/office/drawing/2010/main" xmlns="" w="9525">
                     <a:solidFill>
                       <a:srgbClr val="000000"/>
                     </a:solidFill>
@@ -9373,7 +9373,7 @@
               </a:ln>
               <a:extLst>
                 <a:ext uri="{91240B29-F687-4f45-9708-019B960494DF}">
-                  <a14:hiddenLine xmlns="" xmlns:a14="http://schemas.microsoft.com/office/drawing/2010/main" w="9525">
+                  <a14:hiddenLine xmlns:a14="http://schemas.microsoft.com/office/drawing/2010/main" xmlns="" w="9525">
                     <a:solidFill>
                       <a:srgbClr val="000000"/>
                     </a:solidFill>
@@ -9463,7 +9463,7 @@
               </a:ln>
               <a:extLst>
                 <a:ext uri="{91240B29-F687-4f45-9708-019B960494DF}">
-                  <a14:hiddenLine xmlns="" xmlns:a14="http://schemas.microsoft.com/office/drawing/2010/main" w="9525">
+                  <a14:hiddenLine xmlns:a14="http://schemas.microsoft.com/office/drawing/2010/main" xmlns="" w="9525">
                     <a:solidFill>
                       <a:srgbClr val="000000"/>
                     </a:solidFill>
@@ -9525,7 +9525,7 @@
               </a:ln>
               <a:extLst>
                 <a:ext uri="{91240B29-F687-4f45-9708-019B960494DF}">
-                  <a14:hiddenLine xmlns="" xmlns:a14="http://schemas.microsoft.com/office/drawing/2010/main" w="9525">
+                  <a14:hiddenLine xmlns:a14="http://schemas.microsoft.com/office/drawing/2010/main" xmlns="" w="9525">
                     <a:solidFill>
                       <a:srgbClr val="000000"/>
                     </a:solidFill>
@@ -9587,7 +9587,7 @@
               </a:ln>
               <a:extLst>
                 <a:ext uri="{91240B29-F687-4f45-9708-019B960494DF}">
-                  <a14:hiddenLine xmlns="" xmlns:a14="http://schemas.microsoft.com/office/drawing/2010/main" w="9525">
+                  <a14:hiddenLine xmlns:a14="http://schemas.microsoft.com/office/drawing/2010/main" xmlns="" w="9525">
                     <a:solidFill>
                       <a:srgbClr val="000000"/>
                     </a:solidFill>
@@ -9677,7 +9677,7 @@
               </a:ln>
               <a:extLst>
                 <a:ext uri="{91240B29-F687-4f45-9708-019B960494DF}">
-                  <a14:hiddenLine xmlns="" xmlns:a14="http://schemas.microsoft.com/office/drawing/2010/main" w="9525">
+                  <a14:hiddenLine xmlns:a14="http://schemas.microsoft.com/office/drawing/2010/main" xmlns="" w="9525">
                     <a:solidFill>
                       <a:srgbClr val="000000"/>
                     </a:solidFill>
@@ -9767,7 +9767,7 @@
               </a:ln>
               <a:extLst>
                 <a:ext uri="{91240B29-F687-4f45-9708-019B960494DF}">
-                  <a14:hiddenLine xmlns="" xmlns:a14="http://schemas.microsoft.com/office/drawing/2010/main" w="9525">
+                  <a14:hiddenLine xmlns:a14="http://schemas.microsoft.com/office/drawing/2010/main" xmlns="" w="9525">
                     <a:solidFill>
                       <a:srgbClr val="000000"/>
                     </a:solidFill>
@@ -9829,7 +9829,7 @@
               </a:ln>
               <a:extLst>
                 <a:ext uri="{91240B29-F687-4f45-9708-019B960494DF}">
-                  <a14:hiddenLine xmlns="" xmlns:a14="http://schemas.microsoft.com/office/drawing/2010/main" w="9525">
+                  <a14:hiddenLine xmlns:a14="http://schemas.microsoft.com/office/drawing/2010/main" xmlns="" w="9525">
                     <a:solidFill>
                       <a:srgbClr val="000000"/>
                     </a:solidFill>
@@ -9939,7 +9939,7 @@
               </a:ln>
               <a:extLst>
                 <a:ext uri="{91240B29-F687-4f45-9708-019B960494DF}">
-                  <a14:hiddenLine xmlns="" xmlns:a14="http://schemas.microsoft.com/office/drawing/2010/main" w="9525">
+                  <a14:hiddenLine xmlns:a14="http://schemas.microsoft.com/office/drawing/2010/main" xmlns="" w="9525">
                     <a:solidFill>
                       <a:srgbClr val="000000"/>
                     </a:solidFill>
@@ -10023,7 +10023,7 @@
               </a:ln>
               <a:extLst>
                 <a:ext uri="{91240B29-F687-4f45-9708-019B960494DF}">
-                  <a14:hiddenLine xmlns="" xmlns:a14="http://schemas.microsoft.com/office/drawing/2010/main" w="9525">
+                  <a14:hiddenLine xmlns:a14="http://schemas.microsoft.com/office/drawing/2010/main" xmlns="" w="9525">
                     <a:solidFill>
                       <a:srgbClr val="000000"/>
                     </a:solidFill>
@@ -10085,7 +10085,7 @@
               </a:ln>
               <a:extLst>
                 <a:ext uri="{91240B29-F687-4f45-9708-019B960494DF}">
-                  <a14:hiddenLine xmlns="" xmlns:a14="http://schemas.microsoft.com/office/drawing/2010/main" w="9525">
+                  <a14:hiddenLine xmlns:a14="http://schemas.microsoft.com/office/drawing/2010/main" xmlns="" w="9525">
                     <a:solidFill>
                       <a:srgbClr val="000000"/>
                     </a:solidFill>
@@ -10147,7 +10147,7 @@
               </a:ln>
               <a:extLst>
                 <a:ext uri="{91240B29-F687-4f45-9708-019B960494DF}">
-                  <a14:hiddenLine xmlns="" xmlns:a14="http://schemas.microsoft.com/office/drawing/2010/main" w="9525">
+                  <a14:hiddenLine xmlns:a14="http://schemas.microsoft.com/office/drawing/2010/main" xmlns="" w="9525">
                     <a:solidFill>
                       <a:srgbClr val="000000"/>
                     </a:solidFill>
@@ -10237,7 +10237,7 @@
               </a:ln>
               <a:extLst>
                 <a:ext uri="{91240B29-F687-4f45-9708-019B960494DF}">
-                  <a14:hiddenLine xmlns="" xmlns:a14="http://schemas.microsoft.com/office/drawing/2010/main" w="9525">
+                  <a14:hiddenLine xmlns:a14="http://schemas.microsoft.com/office/drawing/2010/main" xmlns="" w="9525">
                     <a:solidFill>
                       <a:srgbClr val="000000"/>
                     </a:solidFill>
@@ -10271,7 +10271,7 @@
               </a:ln>
               <a:extLst>
                 <a:ext uri="{91240B29-F687-4f45-9708-019B960494DF}">
-                  <a14:hiddenLine xmlns="" xmlns:a14="http://schemas.microsoft.com/office/drawing/2010/main" w="9525">
+                  <a14:hiddenLine xmlns:a14="http://schemas.microsoft.com/office/drawing/2010/main" xmlns="" w="9525">
                     <a:solidFill>
                       <a:srgbClr val="000000"/>
                     </a:solidFill>
@@ -10336,7 +10336,7 @@
               </a:ln>
               <a:extLst>
                 <a:ext uri="{91240B29-F687-4f45-9708-019B960494DF}">
-                  <a14:hiddenLine xmlns="" xmlns:a14="http://schemas.microsoft.com/office/drawing/2010/main" w="9525">
+                  <a14:hiddenLine xmlns:a14="http://schemas.microsoft.com/office/drawing/2010/main" xmlns="" w="9525">
                     <a:solidFill>
                       <a:srgbClr val="000000"/>
                     </a:solidFill>
@@ -10426,7 +10426,7 @@
               </a:ln>
               <a:extLst>
                 <a:ext uri="{91240B29-F687-4f45-9708-019B960494DF}">
-                  <a14:hiddenLine xmlns="" xmlns:a14="http://schemas.microsoft.com/office/drawing/2010/main" w="9525">
+                  <a14:hiddenLine xmlns:a14="http://schemas.microsoft.com/office/drawing/2010/main" xmlns="" w="9525">
                     <a:solidFill>
                       <a:srgbClr val="000000"/>
                     </a:solidFill>
@@ -10488,7 +10488,7 @@
               </a:ln>
               <a:extLst>
                 <a:ext uri="{91240B29-F687-4f45-9708-019B960494DF}">
-                  <a14:hiddenLine xmlns="" xmlns:a14="http://schemas.microsoft.com/office/drawing/2010/main" w="9525">
+                  <a14:hiddenLine xmlns:a14="http://schemas.microsoft.com/office/drawing/2010/main" xmlns="" w="9525">
                     <a:solidFill>
                       <a:srgbClr val="000000"/>
                     </a:solidFill>
@@ -10578,7 +10578,7 @@
               </a:ln>
               <a:extLst>
                 <a:ext uri="{91240B29-F687-4f45-9708-019B960494DF}">
-                  <a14:hiddenLine xmlns="" xmlns:a14="http://schemas.microsoft.com/office/drawing/2010/main" w="9525">
+                  <a14:hiddenLine xmlns:a14="http://schemas.microsoft.com/office/drawing/2010/main" xmlns="" w="9525">
                     <a:solidFill>
                       <a:srgbClr val="000000"/>
                     </a:solidFill>
@@ -10643,7 +10643,7 @@
               </a:ln>
               <a:extLst>
                 <a:ext uri="{91240B29-F687-4f45-9708-019B960494DF}">
-                  <a14:hiddenLine xmlns="" xmlns:a14="http://schemas.microsoft.com/office/drawing/2010/main" w="9525">
+                  <a14:hiddenLine xmlns:a14="http://schemas.microsoft.com/office/drawing/2010/main" xmlns="" w="9525">
                     <a:solidFill>
                       <a:srgbClr val="000000"/>
                     </a:solidFill>
@@ -10705,7 +10705,7 @@
               </a:ln>
               <a:extLst>
                 <a:ext uri="{91240B29-F687-4f45-9708-019B960494DF}">
-                  <a14:hiddenLine xmlns="" xmlns:a14="http://schemas.microsoft.com/office/drawing/2010/main" w="9525">
+                  <a14:hiddenLine xmlns:a14="http://schemas.microsoft.com/office/drawing/2010/main" xmlns="" w="9525">
                     <a:solidFill>
                       <a:srgbClr val="000000"/>
                     </a:solidFill>
@@ -10795,7 +10795,7 @@
               </a:ln>
               <a:extLst>
                 <a:ext uri="{91240B29-F687-4f45-9708-019B960494DF}">
-                  <a14:hiddenLine xmlns="" xmlns:a14="http://schemas.microsoft.com/office/drawing/2010/main" w="9525">
+                  <a14:hiddenLine xmlns:a14="http://schemas.microsoft.com/office/drawing/2010/main" xmlns="" w="9525">
                     <a:solidFill>
                       <a:srgbClr val="000000"/>
                     </a:solidFill>
@@ -10885,7 +10885,7 @@
               </a:ln>
               <a:extLst>
                 <a:ext uri="{91240B29-F687-4f45-9708-019B960494DF}">
-                  <a14:hiddenLine xmlns="" xmlns:a14="http://schemas.microsoft.com/office/drawing/2010/main" w="9525">
+                  <a14:hiddenLine xmlns:a14="http://schemas.microsoft.com/office/drawing/2010/main" xmlns="" w="9525">
                     <a:solidFill>
                       <a:srgbClr val="000000"/>
                     </a:solidFill>
@@ -10950,7 +10950,7 @@
               </a:ln>
               <a:extLst>
                 <a:ext uri="{91240B29-F687-4f45-9708-019B960494DF}">
-                  <a14:hiddenLine xmlns="" xmlns:a14="http://schemas.microsoft.com/office/drawing/2010/main" w="9525">
+                  <a14:hiddenLine xmlns:a14="http://schemas.microsoft.com/office/drawing/2010/main" xmlns="" w="9525">
                     <a:solidFill>
                       <a:srgbClr val="000000"/>
                     </a:solidFill>
@@ -11070,7 +11070,7 @@
               </a:ln>
               <a:extLst>
                 <a:ext uri="{91240B29-F687-4f45-9708-019B960494DF}">
-                  <a14:hiddenLine xmlns="" xmlns:a14="http://schemas.microsoft.com/office/drawing/2010/main" w="9525">
+                  <a14:hiddenLine xmlns:a14="http://schemas.microsoft.com/office/drawing/2010/main" xmlns="" w="9525">
                     <a:solidFill>
                       <a:srgbClr val="000000"/>
                     </a:solidFill>
@@ -11168,7 +11168,7 @@
               </a:ln>
               <a:extLst>
                 <a:ext uri="{91240B29-F687-4f45-9708-019B960494DF}">
-                  <a14:hiddenLine xmlns="" xmlns:a14="http://schemas.microsoft.com/office/drawing/2010/main" w="9525">
+                  <a14:hiddenLine xmlns:a14="http://schemas.microsoft.com/office/drawing/2010/main" xmlns="" w="9525">
                     <a:solidFill>
                       <a:srgbClr val="000000"/>
                     </a:solidFill>
@@ -11283,7 +11283,7 @@
               </a:ln>
               <a:extLst>
                 <a:ext uri="{91240B29-F687-4f45-9708-019B960494DF}">
-                  <a14:hiddenLine xmlns="" xmlns:a14="http://schemas.microsoft.com/office/drawing/2010/main" w="9525">
+                  <a14:hiddenLine xmlns:a14="http://schemas.microsoft.com/office/drawing/2010/main" xmlns="" w="9525">
                     <a:solidFill>
                       <a:srgbClr val="000000"/>
                     </a:solidFill>
@@ -11373,7 +11373,7 @@
               </a:ln>
               <a:extLst>
                 <a:ext uri="{91240B29-F687-4f45-9708-019B960494DF}">
-                  <a14:hiddenLine xmlns="" xmlns:a14="http://schemas.microsoft.com/office/drawing/2010/main" w="9525">
+                  <a14:hiddenLine xmlns:a14="http://schemas.microsoft.com/office/drawing/2010/main" xmlns="" w="9525">
                     <a:solidFill>
                       <a:srgbClr val="000000"/>
                     </a:solidFill>
@@ -11438,7 +11438,7 @@
               </a:ln>
               <a:extLst>
                 <a:ext uri="{91240B29-F687-4f45-9708-019B960494DF}">
-                  <a14:hiddenLine xmlns="" xmlns:a14="http://schemas.microsoft.com/office/drawing/2010/main" w="9525">
+                  <a14:hiddenLine xmlns:a14="http://schemas.microsoft.com/office/drawing/2010/main" xmlns="" w="9525">
                     <a:solidFill>
                       <a:srgbClr val="000000"/>
                     </a:solidFill>
@@ -11528,7 +11528,7 @@
               </a:ln>
               <a:extLst>
                 <a:ext uri="{91240B29-F687-4f45-9708-019B960494DF}">
-                  <a14:hiddenLine xmlns="" xmlns:a14="http://schemas.microsoft.com/office/drawing/2010/main" w="9525">
+                  <a14:hiddenLine xmlns:a14="http://schemas.microsoft.com/office/drawing/2010/main" xmlns="" w="9525">
                     <a:solidFill>
                       <a:srgbClr val="000000"/>
                     </a:solidFill>
@@ -11596,7 +11596,7 @@
               </a:ln>
               <a:extLst>
                 <a:ext uri="{91240B29-F687-4f45-9708-019B960494DF}">
-                  <a14:hiddenLine xmlns="" xmlns:a14="http://schemas.microsoft.com/office/drawing/2010/main" w="9525">
+                  <a14:hiddenLine xmlns:a14="http://schemas.microsoft.com/office/drawing/2010/main" xmlns="" w="9525">
                     <a:solidFill>
                       <a:srgbClr val="000000"/>
                     </a:solidFill>
@@ -11686,7 +11686,7 @@
               </a:ln>
               <a:extLst>
                 <a:ext uri="{91240B29-F687-4f45-9708-019B960494DF}">
-                  <a14:hiddenLine xmlns="" xmlns:a14="http://schemas.microsoft.com/office/drawing/2010/main" w="9525">
+                  <a14:hiddenLine xmlns:a14="http://schemas.microsoft.com/office/drawing/2010/main" xmlns="" w="9525">
                     <a:solidFill>
                       <a:srgbClr val="000000"/>
                     </a:solidFill>
@@ -11754,7 +11754,7 @@
               </a:ln>
               <a:extLst>
                 <a:ext uri="{91240B29-F687-4f45-9708-019B960494DF}">
-                  <a14:hiddenLine xmlns="" xmlns:a14="http://schemas.microsoft.com/office/drawing/2010/main" w="9525">
+                  <a14:hiddenLine xmlns:a14="http://schemas.microsoft.com/office/drawing/2010/main" xmlns="" w="9525">
                     <a:solidFill>
                       <a:srgbClr val="000000"/>
                     </a:solidFill>
@@ -11844,7 +11844,7 @@
               </a:ln>
               <a:extLst>
                 <a:ext uri="{91240B29-F687-4f45-9708-019B960494DF}">
-                  <a14:hiddenLine xmlns="" xmlns:a14="http://schemas.microsoft.com/office/drawing/2010/main" w="9525">
+                  <a14:hiddenLine xmlns:a14="http://schemas.microsoft.com/office/drawing/2010/main" xmlns="" w="9525">
                     <a:solidFill>
                       <a:srgbClr val="000000"/>
                     </a:solidFill>
@@ -11878,7 +11878,7 @@
               </a:ln>
               <a:extLst>
                 <a:ext uri="{91240B29-F687-4f45-9708-019B960494DF}">
-                  <a14:hiddenLine xmlns="" xmlns:a14="http://schemas.microsoft.com/office/drawing/2010/main" w="9525">
+                  <a14:hiddenLine xmlns:a14="http://schemas.microsoft.com/office/drawing/2010/main" xmlns="" w="9525">
                     <a:solidFill>
                       <a:srgbClr val="000000"/>
                     </a:solidFill>
@@ -12018,7 +12018,7 @@
           <a:p>
             <a:fld id="{64DCE64C-8487-40EE-8727-5E483AC79F68}" type="datetimeFigureOut">
               <a:rPr lang="ru-RU" smtClean="0"/>
-              <a:t>2015.01.15</a:t>
+              <a:t>2015.01.16</a:t>
             </a:fld>
             <a:endParaRPr lang="ru-RU"/>
           </a:p>
@@ -12506,12 +12506,44 @@
         </p:blipFill>
         <p:spPr>
           <a:xfrm>
-            <a:off x="5008033" y="770021"/>
+            <a:off x="4655106" y="830178"/>
             <a:ext cx="6630737" cy="4973053"/>
           </a:xfrm>
           <a:prstGeom prst="rect">
             <a:avLst/>
           </a:prstGeom>
+          <a:solidFill>
+            <a:srgbClr val="FFFFFF">
+              <a:shade val="85000"/>
+            </a:srgbClr>
+          </a:solidFill>
+          <a:ln w="190500" cap="sq">
+            <a:solidFill>
+              <a:srgbClr val="FFFFFF"/>
+            </a:solidFill>
+            <a:miter lim="800000"/>
+          </a:ln>
+          <a:effectLst>
+            <a:outerShdw blurRad="65000" dist="50800" dir="12900000" kx="195000" ky="145000" algn="tl" rotWithShape="0">
+              <a:srgbClr val="000000">
+                <a:alpha val="30000"/>
+              </a:srgbClr>
+            </a:outerShdw>
+          </a:effectLst>
+          <a:scene3d>
+            <a:camera prst="orthographicFront">
+              <a:rot lat="0" lon="0" rev="360000"/>
+            </a:camera>
+            <a:lightRig rig="twoPt" dir="t">
+              <a:rot lat="0" lon="0" rev="7200000"/>
+            </a:lightRig>
+          </a:scene3d>
+          <a:sp3d contourW="12700">
+            <a:bevelT w="25400" h="19050"/>
+            <a:contourClr>
+              <a:srgbClr val="969696"/>
+            </a:contourClr>
+          </a:sp3d>
         </p:spPr>
       </p:pic>
     </p:spTree>
@@ -12524,6 +12556,13 @@
   <p:clrMapOvr>
     <a:masterClrMapping/>
   </p:clrMapOvr>
+  <p:timing>
+    <p:tnLst>
+      <p:par>
+        <p:cTn id="1" dur="indefinite" restart="never" nodeType="tmRoot"/>
+      </p:par>
+    </p:tnLst>
+  </p:timing>
 </p:sld>
 </file>
 
@@ -12641,6 +12680,13 @@
   <p:clrMapOvr>
     <a:masterClrMapping/>
   </p:clrMapOvr>
+  <p:timing>
+    <p:tnLst>
+      <p:par>
+        <p:cTn id="1" dur="indefinite" restart="never" nodeType="tmRoot"/>
+      </p:par>
+    </p:tnLst>
+  </p:timing>
 </p:sld>
 </file>
 
@@ -12764,6 +12810,13 @@
   <p:clrMapOvr>
     <a:masterClrMapping/>
   </p:clrMapOvr>
+  <p:timing>
+    <p:tnLst>
+      <p:par>
+        <p:cTn id="1" dur="indefinite" restart="never" nodeType="tmRoot"/>
+      </p:par>
+    </p:tnLst>
+  </p:timing>
 </p:sld>
 </file>
 
